--- a/MCCOG VE Extras Installation Guide.pptx
+++ b/MCCOG VE Extras Installation Guide.pptx
@@ -23865,7 +23865,7 @@
         <p:spPr>
           <a:xfrm>
             <a:off x="838200" y="1600200"/>
-            <a:ext cx="10515600" cy="2518638"/>
+            <a:ext cx="6184899" cy="2949525"/>
           </a:xfrm>
         </p:spPr>
         <p:txBody>
@@ -23990,7 +23990,7 @@
         </p:nvGrpSpPr>
         <p:grpSpPr>
           <a:xfrm>
-            <a:off x="1161532" y="2592007"/>
+            <a:off x="1161532" y="2743262"/>
             <a:ext cx="2800350" cy="535024"/>
             <a:chOff x="7477125" y="502329"/>
             <a:chExt cx="2800350" cy="535024"/>
@@ -24082,7 +24082,7 @@
         </p:blipFill>
         <p:spPr>
           <a:xfrm>
-            <a:off x="4625181" y="3961295"/>
+            <a:off x="2796381" y="4178801"/>
             <a:ext cx="2941638" cy="2013288"/>
           </a:xfrm>
           <a:prstGeom prst="rect">
@@ -24095,6 +24095,150 @@
           </a:ln>
         </p:spPr>
       </p:pic>
+      <p:sp>
+        <p:nvSpPr>
+          <p:cNvPr id="5" name="Rectangle: Rounded Corners 4">
+            <a:extLst>
+              <a:ext uri="{FF2B5EF4-FFF2-40B4-BE49-F238E27FC236}">
+                <a16:creationId xmlns:a16="http://schemas.microsoft.com/office/drawing/2014/main" id="{51C102C3-7936-FB90-5336-319167BE0910}"/>
+              </a:ext>
+            </a:extLst>
+          </p:cNvPr>
+          <p:cNvSpPr/>
+          <p:nvPr/>
+        </p:nvSpPr>
+        <p:spPr>
+          <a:xfrm>
+            <a:off x="7865215" y="3529405"/>
+            <a:ext cx="3998842" cy="834634"/>
+          </a:xfrm>
+          <a:prstGeom prst="roundRect">
+            <a:avLst>
+              <a:gd name="adj" fmla="val 5769"/>
+            </a:avLst>
+          </a:prstGeom>
+          <a:solidFill>
+            <a:schemeClr val="bg1">
+              <a:lumMod val="95000"/>
+            </a:schemeClr>
+          </a:solidFill>
+          <a:ln w="28575">
+            <a:solidFill>
+              <a:schemeClr val="bg2"/>
+            </a:solidFill>
+          </a:ln>
+        </p:spPr>
+        <p:style>
+          <a:lnRef idx="2">
+            <a:schemeClr val="accent1">
+              <a:shade val="15000"/>
+            </a:schemeClr>
+          </a:lnRef>
+          <a:fillRef idx="1">
+            <a:schemeClr val="accent1"/>
+          </a:fillRef>
+          <a:effectRef idx="0">
+            <a:schemeClr val="accent1"/>
+          </a:effectRef>
+          <a:fontRef idx="minor">
+            <a:schemeClr val="lt1"/>
+          </a:fontRef>
+        </p:style>
+        <p:txBody>
+          <a:bodyPr rtlCol="0" anchor="ctr"/>
+          <a:lstStyle/>
+          <a:p>
+            <a:r>
+              <a:rPr lang="en-US" sz="1400" b="1" dirty="0">
+                <a:solidFill>
+                  <a:schemeClr val="tx1"/>
+                </a:solidFill>
+                <a:cs typeface="Arial"/>
+              </a:rPr>
+              <a:t>Export default is to CSV format. SQL is another common format for the export. </a:t>
+            </a:r>
+          </a:p>
+          <a:p>
+            <a:endParaRPr lang="en-US" sz="1400" b="1" dirty="0">
+              <a:solidFill>
+                <a:schemeClr val="tx1"/>
+              </a:solidFill>
+              <a:cs typeface="Arial"/>
+            </a:endParaRPr>
+          </a:p>
+        </p:txBody>
+      </p:sp>
+      <p:pic>
+        <p:nvPicPr>
+          <p:cNvPr id="6" name="Graphic 5" descr="Lights On outline">
+            <a:extLst>
+              <a:ext uri="{FF2B5EF4-FFF2-40B4-BE49-F238E27FC236}">
+                <a16:creationId xmlns:a16="http://schemas.microsoft.com/office/drawing/2014/main" id="{C33D0FAC-A91A-94EF-79E4-9756710B2A93}"/>
+              </a:ext>
+            </a:extLst>
+          </p:cNvPr>
+          <p:cNvPicPr>
+            <a:picLocks noChangeAspect="1"/>
+          </p:cNvPicPr>
+          <p:nvPr/>
+        </p:nvPicPr>
+        <p:blipFill>
+          <a:blip>
+            <a:extLst>
+              <a:ext uri="{96DAC541-7B7A-43D3-8B79-37D633B846F1}">
+                <asvg:svgBlip xmlns:asvg="http://schemas.microsoft.com/office/drawing/2016/SVG/main" r:embed="rId5"/>
+              </a:ext>
+            </a:extLst>
+          </a:blip>
+          <a:stretch>
+            <a:fillRect/>
+          </a:stretch>
+        </p:blipFill>
+        <p:spPr>
+          <a:xfrm>
+            <a:off x="7865215" y="2763950"/>
+            <a:ext cx="699106" cy="699106"/>
+          </a:xfrm>
+          <a:prstGeom prst="rect">
+            <a:avLst/>
+          </a:prstGeom>
+        </p:spPr>
+      </p:pic>
+      <p:sp>
+        <p:nvSpPr>
+          <p:cNvPr id="7" name="TextBox 6">
+            <a:extLst>
+              <a:ext uri="{FF2B5EF4-FFF2-40B4-BE49-F238E27FC236}">
+                <a16:creationId xmlns:a16="http://schemas.microsoft.com/office/drawing/2014/main" id="{6C210744-4F9B-2177-0BD6-90C0A23AB9FC}"/>
+              </a:ext>
+            </a:extLst>
+          </p:cNvPr>
+          <p:cNvSpPr txBox="1"/>
+          <p:nvPr/>
+        </p:nvSpPr>
+        <p:spPr>
+          <a:xfrm>
+            <a:off x="8564321" y="2959492"/>
+            <a:ext cx="2131308" cy="369332"/>
+          </a:xfrm>
+          <a:prstGeom prst="rect">
+            <a:avLst/>
+          </a:prstGeom>
+          <a:noFill/>
+        </p:spPr>
+        <p:txBody>
+          <a:bodyPr wrap="square" rtlCol="0">
+            <a:spAutoFit/>
+          </a:bodyPr>
+          <a:lstStyle/>
+          <a:p>
+            <a:r>
+              <a:rPr lang="en-US" dirty="0"/>
+              <a:t>Did You Know?</a:t>
+            </a:r>
+          </a:p>
+        </p:txBody>
+      </p:sp>
     </p:spTree>
     <p:extLst>
       <p:ext uri="{BB962C8B-B14F-4D97-AF65-F5344CB8AC3E}">
@@ -25117,11 +25261,13 @@
         </p:nvSpPr>
         <p:spPr>
           <a:xfrm>
-            <a:off x="7158868" y="1488459"/>
-            <a:ext cx="3648694" cy="2494251"/>
+            <a:off x="7150741" y="1908628"/>
+            <a:ext cx="4713316" cy="2105025"/>
           </a:xfrm>
           <a:prstGeom prst="roundRect">
-            <a:avLst/>
+            <a:avLst>
+              <a:gd name="adj" fmla="val 5769"/>
+            </a:avLst>
           </a:prstGeom>
           <a:solidFill>
             <a:schemeClr val="bg1">
@@ -25155,7 +25301,7 @@
           <a:lstStyle/>
           <a:p>
             <a:r>
-              <a:rPr lang="en-US" sz="1400" b="1">
+              <a:rPr lang="en-US" sz="1400" b="1" dirty="0">
                 <a:solidFill>
                   <a:schemeClr val="tx1"/>
                 </a:solidFill>
@@ -25164,7 +25310,7 @@
               <a:t>Note</a:t>
             </a:r>
             <a:r>
-              <a:rPr lang="en-US" sz="1400">
+              <a:rPr lang="en-US" sz="1400" dirty="0">
                 <a:solidFill>
                   <a:schemeClr val="tx1"/>
                 </a:solidFill>
@@ -25173,7 +25319,7 @@
               <a:t> that the model is created under a folder named after the R version used when running </a:t>
             </a:r>
             <a:r>
-              <a:rPr lang="en-US" sz="1400" err="1">
+              <a:rPr lang="en-US" sz="1400" dirty="0" err="1">
                 <a:solidFill>
                   <a:schemeClr val="tx1"/>
                 </a:solidFill>
@@ -25182,7 +25328,7 @@
               <a:t>ve.build</a:t>
             </a:r>
             <a:r>
-              <a:rPr lang="en-US" sz="1400">
+              <a:rPr lang="en-US" sz="1400" dirty="0">
                 <a:solidFill>
                   <a:schemeClr val="tx1"/>
                 </a:solidFill>
@@ -25191,7 +25337,7 @@
               <a:t>(), e.g. built/</a:t>
             </a:r>
             <a:r>
-              <a:rPr lang="en-US" sz="1400" err="1">
+              <a:rPr lang="en-US" sz="1400" dirty="0" err="1">
                 <a:solidFill>
                   <a:schemeClr val="tx1"/>
                 </a:solidFill>
@@ -25200,16 +25346,35 @@
               <a:t>visioneval</a:t>
             </a:r>
             <a:r>
-              <a:rPr lang="en-US" sz="1400">
+              <a:rPr lang="en-US" sz="1400" dirty="0">
                 <a:solidFill>
                   <a:schemeClr val="tx1"/>
                 </a:solidFill>
                 <a:cs typeface="Arial"/>
               </a:rPr>
-              <a:t>/4.3.3. When running the model, the same R version must be used. If using a different R version (e.g. 4.3.1), first the model must be built under that version and the model saved in built/</a:t>
-            </a:r>
-            <a:r>
-              <a:rPr lang="en-US" sz="1400" err="1">
+              <a:t>/4.3.3. When running the model, the same R version must be used. </a:t>
+            </a:r>
+          </a:p>
+          <a:p>
+            <a:endParaRPr lang="en-US" sz="1400" dirty="0">
+              <a:solidFill>
+                <a:schemeClr val="tx1"/>
+              </a:solidFill>
+              <a:cs typeface="Arial"/>
+            </a:endParaRPr>
+          </a:p>
+          <a:p>
+            <a:r>
+              <a:rPr lang="en-US" sz="1400" dirty="0">
+                <a:solidFill>
+                  <a:schemeClr val="tx1"/>
+                </a:solidFill>
+                <a:cs typeface="Arial"/>
+              </a:rPr>
+              <a:t>If using a different R version (e.g. 4.3.1), first the model must be built under that version and the model saved in built/</a:t>
+            </a:r>
+            <a:r>
+              <a:rPr lang="en-US" sz="1400" dirty="0" err="1">
                 <a:solidFill>
                   <a:schemeClr val="tx1"/>
                 </a:solidFill>
@@ -25218,7 +25383,7 @@
               <a:t>visoneval</a:t>
             </a:r>
             <a:r>
-              <a:rPr lang="en-US" sz="1400">
+              <a:rPr lang="en-US" sz="1400" dirty="0">
                 <a:solidFill>
                   <a:schemeClr val="tx1"/>
                 </a:solidFill>
@@ -25424,6 +25589,77 @@
           </a:p>
         </p:txBody>
       </p:sp>
+      <p:pic>
+        <p:nvPicPr>
+          <p:cNvPr id="7" name="Graphic 6" descr="Lights On outline">
+            <a:extLst>
+              <a:ext uri="{FF2B5EF4-FFF2-40B4-BE49-F238E27FC236}">
+                <a16:creationId xmlns:a16="http://schemas.microsoft.com/office/drawing/2014/main" id="{5A571166-E43B-F70C-870B-B126B3BD5B4A}"/>
+              </a:ext>
+            </a:extLst>
+          </p:cNvPr>
+          <p:cNvPicPr>
+            <a:picLocks noChangeAspect="1"/>
+          </p:cNvPicPr>
+          <p:nvPr/>
+        </p:nvPicPr>
+        <p:blipFill>
+          <a:blip>
+            <a:extLst>
+              <a:ext uri="{96DAC541-7B7A-43D3-8B79-37D633B846F1}">
+                <asvg:svgBlip xmlns:asvg="http://schemas.microsoft.com/office/drawing/2016/SVG/main" r:embed="rId5"/>
+              </a:ext>
+            </a:extLst>
+          </a:blip>
+          <a:stretch>
+            <a:fillRect/>
+          </a:stretch>
+        </p:blipFill>
+        <p:spPr>
+          <a:xfrm>
+            <a:off x="7291042" y="1143174"/>
+            <a:ext cx="699106" cy="699106"/>
+          </a:xfrm>
+          <a:prstGeom prst="rect">
+            <a:avLst/>
+          </a:prstGeom>
+        </p:spPr>
+      </p:pic>
+      <p:sp>
+        <p:nvSpPr>
+          <p:cNvPr id="8" name="TextBox 7">
+            <a:extLst>
+              <a:ext uri="{FF2B5EF4-FFF2-40B4-BE49-F238E27FC236}">
+                <a16:creationId xmlns:a16="http://schemas.microsoft.com/office/drawing/2014/main" id="{D5CC9959-5BDB-EB61-AEA2-5919A9E1DE20}"/>
+              </a:ext>
+            </a:extLst>
+          </p:cNvPr>
+          <p:cNvSpPr txBox="1"/>
+          <p:nvPr/>
+        </p:nvSpPr>
+        <p:spPr>
+          <a:xfrm>
+            <a:off x="7990148" y="1338716"/>
+            <a:ext cx="2131308" cy="369332"/>
+          </a:xfrm>
+          <a:prstGeom prst="rect">
+            <a:avLst/>
+          </a:prstGeom>
+          <a:noFill/>
+        </p:spPr>
+        <p:txBody>
+          <a:bodyPr wrap="square" rtlCol="0">
+            <a:spAutoFit/>
+          </a:bodyPr>
+          <a:lstStyle/>
+          <a:p>
+            <a:r>
+              <a:rPr lang="en-US" dirty="0"/>
+              <a:t>Did You Know?</a:t>
+            </a:r>
+          </a:p>
+        </p:txBody>
+      </p:sp>
     </p:spTree>
     <p:extLst>
       <p:ext uri="{BB962C8B-B14F-4D97-AF65-F5344CB8AC3E}">
@@ -25523,11 +25759,13 @@
         </p:nvSpPr>
         <p:spPr>
           <a:xfrm>
-            <a:off x="838200" y="1313716"/>
-            <a:ext cx="7730765" cy="3536579"/>
+            <a:off x="925095" y="1790663"/>
+            <a:ext cx="8872048" cy="3241502"/>
           </a:xfrm>
           <a:prstGeom prst="roundRect">
-            <a:avLst/>
+            <a:avLst>
+              <a:gd name="adj" fmla="val 6947"/>
+            </a:avLst>
           </a:prstGeom>
           <a:solidFill>
             <a:schemeClr val="bg1">
@@ -25821,6 +26059,59 @@
               </a:rPr>
               <a:t> reflect driverless and car service modules</a:t>
             </a:r>
+          </a:p>
+        </p:txBody>
+      </p:sp>
+      <p:sp>
+        <p:nvSpPr>
+          <p:cNvPr id="4" name="TextBox 3">
+            <a:extLst>
+              <a:ext uri="{FF2B5EF4-FFF2-40B4-BE49-F238E27FC236}">
+                <a16:creationId xmlns:a16="http://schemas.microsoft.com/office/drawing/2014/main" id="{4E73DACD-6051-C5FB-ABAA-FD5EC3664B91}"/>
+              </a:ext>
+            </a:extLst>
+          </p:cNvPr>
+          <p:cNvSpPr txBox="1"/>
+          <p:nvPr/>
+        </p:nvSpPr>
+        <p:spPr>
+          <a:xfrm>
+            <a:off x="751114" y="1168751"/>
+            <a:ext cx="8337883" cy="369332"/>
+          </a:xfrm>
+          <a:prstGeom prst="rect">
+            <a:avLst/>
+          </a:prstGeom>
+          <a:noFill/>
+        </p:spPr>
+        <p:txBody>
+          <a:bodyPr wrap="square">
+            <a:spAutoFit/>
+          </a:bodyPr>
+          <a:lstStyle/>
+          <a:p>
+            <a:r>
+              <a:rPr lang="en-US" b="1" i="1" dirty="0">
+                <a:latin typeface="Arial"/>
+                <a:cs typeface="Arial"/>
+              </a:rPr>
+              <a:t>Customize your runtime with </a:t>
+            </a:r>
+            <a:r>
+              <a:rPr lang="en-US" b="1" i="1" dirty="0" err="1">
+                <a:latin typeface="Arial"/>
+                <a:cs typeface="Arial"/>
+              </a:rPr>
+              <a:t>MCCOG</a:t>
+            </a:r>
+            <a:r>
+              <a:rPr lang="en-US" b="1" i="1" dirty="0">
+                <a:latin typeface="Arial"/>
+                <a:cs typeface="Arial"/>
+              </a:rPr>
+              <a:t> Specific VE Modules</a:t>
+            </a:r>
+            <a:endParaRPr lang="en-US" b="1" i="1" dirty="0"/>
           </a:p>
         </p:txBody>
       </p:sp>
@@ -30873,6 +31164,15 @@
 </file>
 
 <file path=customXml/item2.xml><?xml version="1.0" encoding="utf-8"?>
+<?mso-contentType ?>
+<FormTemplates xmlns="http://schemas.microsoft.com/sharepoint/v3/contenttype/forms">
+  <Display>DocumentLibraryForm</Display>
+  <Edit>DocumentLibraryForm</Edit>
+  <New>DocumentLibraryForm</New>
+</FormTemplates>
+</file>
+
+<file path=customXml/item3.xml><?xml version="1.0" encoding="utf-8"?>
 <p:properties xmlns:p="http://schemas.microsoft.com/office/2006/metadata/properties" xmlns:xsi="http://www.w3.org/2001/XMLSchema-instance" xmlns:pc="http://schemas.microsoft.com/office/infopath/2007/PartnerControls">
   <documentManagement>
     <TaxCatchAll xmlns="3f39614a-c9a1-44e5-9858-31499fb88fe7" xsi:nil="true"/>
@@ -30881,15 +31181,6 @@
     </lcf76f155ced4ddcb4097134ff3c332f>
   </documentManagement>
 </p:properties>
-</file>
-
-<file path=customXml/item3.xml><?xml version="1.0" encoding="utf-8"?>
-<?mso-contentType ?>
-<FormTemplates xmlns="http://schemas.microsoft.com/sharepoint/v3/contenttype/forms">
-  <Display>DocumentLibraryForm</Display>
-  <Edit>DocumentLibraryForm</Edit>
-  <New>DocumentLibraryForm</New>
-</FormTemplates>
 </file>
 
 <file path=customXml/itemProps1.xml><?xml version="1.0" encoding="utf-8"?>
@@ -30912,6 +31203,14 @@
 </file>
 
 <file path=customXml/itemProps2.xml><?xml version="1.0" encoding="utf-8"?>
+<ds:datastoreItem xmlns:ds="http://schemas.openxmlformats.org/officeDocument/2006/customXml" ds:itemID="{E23E702B-A4A8-49D1-8100-74D24C5D8E81}">
+  <ds:schemaRefs>
+    <ds:schemaRef ds:uri="http://schemas.microsoft.com/sharepoint/v3/contenttype/forms"/>
+  </ds:schemaRefs>
+</ds:datastoreItem>
+</file>
+
+<file path=customXml/itemProps3.xml><?xml version="1.0" encoding="utf-8"?>
 <ds:datastoreItem xmlns:ds="http://schemas.openxmlformats.org/officeDocument/2006/customXml" ds:itemID="{0AB548D2-16E5-4D59-9228-B99A31CAF826}">
   <ds:schemaRefs>
     <ds:schemaRef ds:uri="http://schemas.microsoft.com/office/2006/metadata/properties"/>
@@ -30926,12 +31225,4 @@
     <ds:schemaRef ds:uri="http://purl.org/dc/dcmitype/"/>
   </ds:schemaRefs>
 </ds:datastoreItem>
-</file>
-
-<file path=customXml/itemProps3.xml><?xml version="1.0" encoding="utf-8"?>
-<ds:datastoreItem xmlns:ds="http://schemas.openxmlformats.org/officeDocument/2006/customXml" ds:itemID="{E23E702B-A4A8-49D1-8100-74D24C5D8E81}">
-  <ds:schemaRefs>
-    <ds:schemaRef ds:uri="http://schemas.microsoft.com/sharepoint/v3/contenttype/forms"/>
-  </ds:schemaRefs>
-</ds:datastoreItem>
 </file>